--- a/public/fun/pack/pptx/talkpro/발표템플릿프리미엄_20_연말결산·회고_피스타치오크림.pptx
+++ b/public/fun/pack/pptx/talkpro/발표템플릿프리미엄_20_연말결산·회고_피스타치오크림.pptx
@@ -115,12 +115,12 @@
   <p:extLst>
     <p:ext uri="{521415D9-36F7-43E2-AB2F-B90AF26B5E84}">
       <p14:sectionLst xmlns:p14="http://schemas.microsoft.com/office/powerpoint/2010/main">
-        <p14:section name="시작" id="{11F5F793-EC91-4E23-AFB7-7795691E5359}">
+        <p14:section name="시작" id="{D48A51F0-2404-419A-BE34-7772002B9CE5}">
           <p14:sldIdLst>
             <p14:sldId id="256"/>
           </p14:sldIdLst>
         </p14:section>
-        <p14:section name="본문" id="{C5147D3C-2F23-41D9-9091-1300D788733E}">
+        <p14:section name="본문" id="{9ED706E6-AB45-46CB-BDF1-B6209A47BA79}">
           <p14:sldIdLst>
             <p14:sldId id="257"/>
             <p14:sldId id="258"/>
@@ -131,7 +131,7 @@
             <p14:sldId id="263"/>
           </p14:sldIdLst>
         </p14:section>
-        <p14:section name="마무리" id="{A347B4B4-CE87-4600-9698-047C2B59BD92}">
+        <p14:section name="마무리" id="{57CBE8ED-7A3C-4174-8D80-B5B17D2D3921}">
           <p14:sldIdLst>
             <p14:sldId id="264"/>
           </p14:sldIdLst>
@@ -3243,7 +3243,7 @@
             </a:lvl1pPr>
           </a:lstStyle>
           <a:p>
-            <a:fld id="{6AA30EDD-E2B1-45F5-B275-FE80D5414521}" type="slidenum">
+            <a:fld id="{5405DCA0-F662-405A-BEE1-779823DFEDA4}" type="slidenum">
               <a:rPr lang="en-US"/>
               <a:t>‹#›</a:t>
             </a:fld>
@@ -5354,7 +5354,7 @@
             </a:lvl1pPr>
           </a:lstStyle>
           <a:p>
-            <a:fld id="{F815EBC2-17DD-454E-8DB9-9269D9E5B590}" type="slidenum">
+            <a:fld id="{F45E9DD3-52B3-46EC-8BBD-D32E44ADB032}" type="slidenum">
               <a:rPr lang="en-US"/>
               <a:t>‹#›</a:t>
             </a:fld>
@@ -6107,7 +6107,7 @@
             </a:lvl1pPr>
           </a:lstStyle>
           <a:p>
-            <a:fld id="{4BBD0084-CDB9-4E8C-95FC-FADA0E917D6D}" type="slidenum">
+            <a:fld id="{A6DFD45A-216A-4516-9440-B881595FD031}" type="slidenum">
               <a:rPr lang="en-US"/>
               <a:t>‹#›</a:t>
             </a:fld>
@@ -7061,7 +7061,7 @@
           <a:p>
             <a:r>
               <a:rPr lang="ko-KR"/>
-              <a:t>0000. 00. 00</a:t>
+              <a:t>날짜 입력</a:t>
             </a:r>
           </a:p>
         </p:txBody>
@@ -7146,7 +7146,7 @@
           <a:bodyPr/>
           <a:lstStyle/>
           <a:p>
-            <a:fld id="{01AC0BEB-DE06-4E15-846C-992FC4A5B8E7}" type="slidenum">
+            <a:fld id="{4A1702E9-068D-484E-8774-4F91ED0945C7}" type="slidenum">
               <a:rPr lang="en-US"/>
               <a:t>‹#›</a:t>
             </a:fld>
@@ -8396,7 +8396,7 @@
           <a:bodyPr/>
           <a:lstStyle/>
           <a:p>
-            <a:fld id="{DBAFF86D-9085-4C4F-9836-2ED41EA55D2C}" type="slidenum">
+            <a:fld id="{24EAA8C4-E2F1-4921-A448-EE16E3C7497E}" type="slidenum">
               <a:rPr lang="en-US"/>
               <a:t>‹#›</a:t>
             </a:fld>
@@ -8484,7 +8484,7 @@
           <a:bodyPr/>
           <a:lstStyle/>
           <a:p>
-            <a:fld id="{8F2C1B11-1EBA-46C6-ADA8-BBBAC43A86B8}" type="slidenum">
+            <a:fld id="{B4263E93-92E3-412A-8681-D65C1712FC63}" type="slidenum">
               <a:rPr lang="en-US"/>
               <a:t>‹#›</a:t>
             </a:fld>
@@ -9493,7 +9493,7 @@
           <a:bodyPr/>
           <a:lstStyle/>
           <a:p>
-            <a:fld id="{BB2B4485-239B-4CF1-A099-212799D11783}" type="slidenum">
+            <a:fld id="{B341CAD4-7D62-4B0C-A1A0-5BAC3246A1D1}" type="slidenum">
               <a:rPr lang="en-US"/>
               <a:t>‹#›</a:t>
             </a:fld>
@@ -10133,7 +10133,7 @@
           <a:bodyPr/>
           <a:lstStyle/>
           <a:p>
-            <a:fld id="{C5F0894A-DE5E-4C9E-AD37-52DA5B1B6DD0}" type="slidenum">
+            <a:fld id="{4D71DCDE-7FF0-451A-A55B-699BF30B342E}" type="slidenum">
               <a:rPr lang="en-US"/>
               <a:t>‹#›</a:t>
             </a:fld>
@@ -10316,7 +10316,7 @@
           <a:bodyPr/>
           <a:lstStyle/>
           <a:p>
-            <a:fld id="{570649C0-C816-4527-A1D9-31B814B6232E}" type="slidenum">
+            <a:fld id="{DDEB80DE-C8C4-443E-9304-4523B32CC11A}" type="slidenum">
               <a:rPr lang="en-US"/>
               <a:t>‹#›</a:t>
             </a:fld>
@@ -11380,7 +11380,7 @@
           <a:bodyPr/>
           <a:lstStyle/>
           <a:p>
-            <a:fld id="{2D35CC49-852D-48E9-A026-C3DD06FDA80B}" type="slidenum">
+            <a:fld id="{19E644A3-F3C8-4623-B29D-9E115592A213}" type="slidenum">
               <a:rPr lang="en-US"/>
               <a:t>‹#›</a:t>
             </a:fld>
